--- a/CA_Documents/Session2.pptx
+++ b/CA_Documents/Session2.pptx
@@ -285,7 +285,7 @@
       </p15:sldGuideLst>
     </p:ext>
     <p:ext uri="http://customooxmlschemas.google.com/">
-      <go:slidesCustomData xmlns:go="http://customooxmlschemas.google.com/" xmlns:ahyp="http://schemas.microsoft.com/office/drawing/2018/hyperlinkcolor" xmlns:p15="http://schemas.microsoft.com/office/powerpoint/2012/main" xmlns:p14="http://schemas.microsoft.com/office/powerpoint/2010/main" xmlns:com="http://schemas.openxmlformats.org/drawingml/2006/compatibility" xmlns:pvml="urn:schemas-microsoft-com:office:powerpoint" xmlns:v="urn:schemas-microsoft-com:vml" xmlns:o="urn:schemas-microsoft-com:office:office" xmlns:dgm="http://schemas.openxmlformats.org/drawingml/2006/diagram" xmlns:c="http://schemas.openxmlformats.org/drawingml/2006/chart" xmlns:mv="urn:schemas-microsoft-com:mac:vml" xmlns:mc="http://schemas.openxmlformats.org/markup-compatibility/2006" xmlns="" r:id="rId38" roundtripDataSignature="AMtx7mjc0IiUAerUTcf8M4ITKc4OOLvFCw=="/>
+      <go:slidesCustomData xmlns="" xmlns:mc="http://schemas.openxmlformats.org/markup-compatibility/2006" xmlns:mv="urn:schemas-microsoft-com:mac:vml" xmlns:c="http://schemas.openxmlformats.org/drawingml/2006/chart" xmlns:dgm="http://schemas.openxmlformats.org/drawingml/2006/diagram" xmlns:o="urn:schemas-microsoft-com:office:office" xmlns:v="urn:schemas-microsoft-com:vml" xmlns:pvml="urn:schemas-microsoft-com:office:powerpoint" xmlns:com="http://schemas.openxmlformats.org/drawingml/2006/compatibility" xmlns:p14="http://schemas.microsoft.com/office/powerpoint/2010/main" xmlns:p15="http://schemas.microsoft.com/office/powerpoint/2012/main" xmlns:ahyp="http://schemas.microsoft.com/office/drawing/2018/hyperlinkcolor" xmlns:go="http://customooxmlschemas.google.com/" r:id="rId38" roundtripDataSignature="AMtx7mjc0IiUAerUTcf8M4ITKc4OOLvFCw=="/>
     </p:ext>
   </p:extLst>
 </p:presentation>
@@ -303,8 +303,8 @@
 <pc:chgInfo xmlns:a="http://schemas.openxmlformats.org/drawingml/2006/main" xmlns:r="http://schemas.openxmlformats.org/officeDocument/2006/relationships" xmlns:ac="http://schemas.microsoft.com/office/drawing/2013/main/command" xmlns:pc="http://schemas.microsoft.com/office/powerpoint/2013/main/command">
   <pc:docChgLst>
     <pc:chgData name="Xiaoling Yi" userId="23f28664-6c59-406e-87ca-bf1cc6d4f6c4" providerId="ADAL" clId="{A88309FF-F38B-4138-8EB8-37BF23FB4DA7}"/>
-    <pc:docChg chg="modSld">
-      <pc:chgData name="Xiaoling Yi" userId="23f28664-6c59-406e-87ca-bf1cc6d4f6c4" providerId="ADAL" clId="{A88309FF-F38B-4138-8EB8-37BF23FB4DA7}" dt="2026-03-02T12:28:46.146" v="7" actId="122"/>
+    <pc:docChg chg="custSel modSld">
+      <pc:chgData name="Xiaoling Yi" userId="23f28664-6c59-406e-87ca-bf1cc6d4f6c4" providerId="ADAL" clId="{A88309FF-F38B-4138-8EB8-37BF23FB4DA7}" dt="2026-03-03T20:45:47.801" v="41" actId="20577"/>
       <pc:docMkLst>
         <pc:docMk/>
       </pc:docMkLst>
@@ -320,6 +320,121 @@
             <pc:docMk/>
             <pc:sldMk cId="0" sldId="256"/>
             <ac:spMk id="301" creationId="{00000000-0000-0000-0000-000000000000}"/>
+          </ac:spMkLst>
+        </pc:spChg>
+      </pc:sldChg>
+      <pc:sldChg chg="delSp modSp mod delAnim">
+        <pc:chgData name="Xiaoling Yi" userId="23f28664-6c59-406e-87ca-bf1cc6d4f6c4" providerId="ADAL" clId="{A88309FF-F38B-4138-8EB8-37BF23FB4DA7}" dt="2026-03-03T20:43:54.787" v="25" actId="478"/>
+        <pc:sldMkLst>
+          <pc:docMk/>
+          <pc:sldMk cId="3669326066" sldId="291"/>
+        </pc:sldMkLst>
+        <pc:spChg chg="mod">
+          <ac:chgData name="Xiaoling Yi" userId="23f28664-6c59-406e-87ca-bf1cc6d4f6c4" providerId="ADAL" clId="{A88309FF-F38B-4138-8EB8-37BF23FB4DA7}" dt="2026-03-03T20:43:20.327" v="11" actId="20577"/>
+          <ac:spMkLst>
+            <pc:docMk/>
+            <pc:sldMk cId="3669326066" sldId="291"/>
+            <ac:spMk id="8" creationId="{190E5BBC-7FDA-EDBB-EC81-878321107AE1}"/>
+          </ac:spMkLst>
+        </pc:spChg>
+        <pc:spChg chg="mod">
+          <ac:chgData name="Xiaoling Yi" userId="23f28664-6c59-406e-87ca-bf1cc6d4f6c4" providerId="ADAL" clId="{A88309FF-F38B-4138-8EB8-37BF23FB4DA7}" dt="2026-03-03T20:43:26.252" v="15" actId="20577"/>
+          <ac:spMkLst>
+            <pc:docMk/>
+            <pc:sldMk cId="3669326066" sldId="291"/>
+            <ac:spMk id="9" creationId="{C33334D6-F17D-6A18-7D90-0B129E891E8D}"/>
+          </ac:spMkLst>
+        </pc:spChg>
+        <pc:spChg chg="mod">
+          <ac:chgData name="Xiaoling Yi" userId="23f28664-6c59-406e-87ca-bf1cc6d4f6c4" providerId="ADAL" clId="{A88309FF-F38B-4138-8EB8-37BF23FB4DA7}" dt="2026-03-03T20:43:52.471" v="24" actId="14100"/>
+          <ac:spMkLst>
+            <pc:docMk/>
+            <pc:sldMk cId="3669326066" sldId="291"/>
+            <ac:spMk id="12" creationId="{D1D47FF4-7A00-9CBA-454B-B752EAA9C1E2}"/>
+          </ac:spMkLst>
+        </pc:spChg>
+        <pc:spChg chg="del">
+          <ac:chgData name="Xiaoling Yi" userId="23f28664-6c59-406e-87ca-bf1cc6d4f6c4" providerId="ADAL" clId="{A88309FF-F38B-4138-8EB8-37BF23FB4DA7}" dt="2026-03-03T20:43:54.787" v="25" actId="478"/>
+          <ac:spMkLst>
+            <pc:docMk/>
+            <pc:sldMk cId="3669326066" sldId="291"/>
+            <ac:spMk id="14" creationId="{8335B34A-C3EE-7BCF-7848-684DA17CA4DC}"/>
+          </ac:spMkLst>
+        </pc:spChg>
+        <pc:spChg chg="mod">
+          <ac:chgData name="Xiaoling Yi" userId="23f28664-6c59-406e-87ca-bf1cc6d4f6c4" providerId="ADAL" clId="{A88309FF-F38B-4138-8EB8-37BF23FB4DA7}" dt="2026-03-03T20:43:34.875" v="23" actId="20577"/>
+          <ac:spMkLst>
+            <pc:docMk/>
+            <pc:sldMk cId="3669326066" sldId="291"/>
+            <ac:spMk id="16" creationId="{84F19B6C-F6FC-53FE-34ED-881D563EF864}"/>
+          </ac:spMkLst>
+        </pc:spChg>
+        <pc:spChg chg="mod">
+          <ac:chgData name="Xiaoling Yi" userId="23f28664-6c59-406e-87ca-bf1cc6d4f6c4" providerId="ADAL" clId="{A88309FF-F38B-4138-8EB8-37BF23FB4DA7}" dt="2026-03-03T20:43:30.589" v="17" actId="20577"/>
+          <ac:spMkLst>
+            <pc:docMk/>
+            <pc:sldMk cId="3669326066" sldId="291"/>
+            <ac:spMk id="18" creationId="{DF4837BE-5F6D-8352-6A12-EF5D6108416C}"/>
+          </ac:spMkLst>
+        </pc:spChg>
+      </pc:sldChg>
+      <pc:sldChg chg="modSp mod">
+        <pc:chgData name="Xiaoling Yi" userId="23f28664-6c59-406e-87ca-bf1cc6d4f6c4" providerId="ADAL" clId="{A88309FF-F38B-4138-8EB8-37BF23FB4DA7}" dt="2026-03-03T20:44:37.824" v="29" actId="20577"/>
+        <pc:sldMkLst>
+          <pc:docMk/>
+          <pc:sldMk cId="3391918667" sldId="301"/>
+        </pc:sldMkLst>
+        <pc:spChg chg="mod">
+          <ac:chgData name="Xiaoling Yi" userId="23f28664-6c59-406e-87ca-bf1cc6d4f6c4" providerId="ADAL" clId="{A88309FF-F38B-4138-8EB8-37BF23FB4DA7}" dt="2026-03-03T20:44:37.824" v="29" actId="20577"/>
+          <ac:spMkLst>
+            <pc:docMk/>
+            <pc:sldMk cId="3391918667" sldId="301"/>
+            <ac:spMk id="17" creationId="{41DDDCCA-1E3F-6D67-29DD-3BB7A9DBC9E4}"/>
+          </ac:spMkLst>
+        </pc:spChg>
+      </pc:sldChg>
+      <pc:sldChg chg="modSp mod">
+        <pc:chgData name="Xiaoling Yi" userId="23f28664-6c59-406e-87ca-bf1cc6d4f6c4" providerId="ADAL" clId="{A88309FF-F38B-4138-8EB8-37BF23FB4DA7}" dt="2026-03-03T20:44:58.433" v="33" actId="20577"/>
+        <pc:sldMkLst>
+          <pc:docMk/>
+          <pc:sldMk cId="679846694" sldId="302"/>
+        </pc:sldMkLst>
+        <pc:spChg chg="mod">
+          <ac:chgData name="Xiaoling Yi" userId="23f28664-6c59-406e-87ca-bf1cc6d4f6c4" providerId="ADAL" clId="{A88309FF-F38B-4138-8EB8-37BF23FB4DA7}" dt="2026-03-03T20:44:58.433" v="33" actId="20577"/>
+          <ac:spMkLst>
+            <pc:docMk/>
+            <pc:sldMk cId="679846694" sldId="302"/>
+            <ac:spMk id="22" creationId="{2FF847B5-95B7-A955-4E87-D016069F8027}"/>
+          </ac:spMkLst>
+        </pc:spChg>
+      </pc:sldChg>
+      <pc:sldChg chg="modSp mod">
+        <pc:chgData name="Xiaoling Yi" userId="23f28664-6c59-406e-87ca-bf1cc6d4f6c4" providerId="ADAL" clId="{A88309FF-F38B-4138-8EB8-37BF23FB4DA7}" dt="2026-03-03T20:45:14.099" v="37" actId="20577"/>
+        <pc:sldMkLst>
+          <pc:docMk/>
+          <pc:sldMk cId="1180684184" sldId="303"/>
+        </pc:sldMkLst>
+        <pc:spChg chg="mod">
+          <ac:chgData name="Xiaoling Yi" userId="23f28664-6c59-406e-87ca-bf1cc6d4f6c4" providerId="ADAL" clId="{A88309FF-F38B-4138-8EB8-37BF23FB4DA7}" dt="2026-03-03T20:45:14.099" v="37" actId="20577"/>
+          <ac:spMkLst>
+            <pc:docMk/>
+            <pc:sldMk cId="1180684184" sldId="303"/>
+            <ac:spMk id="22" creationId="{2FF847B5-95B7-A955-4E87-D016069F8027}"/>
+          </ac:spMkLst>
+        </pc:spChg>
+      </pc:sldChg>
+      <pc:sldChg chg="modSp mod">
+        <pc:chgData name="Xiaoling Yi" userId="23f28664-6c59-406e-87ca-bf1cc6d4f6c4" providerId="ADAL" clId="{A88309FF-F38B-4138-8EB8-37BF23FB4DA7}" dt="2026-03-03T20:45:47.801" v="41" actId="20577"/>
+        <pc:sldMkLst>
+          <pc:docMk/>
+          <pc:sldMk cId="1241367408" sldId="304"/>
+        </pc:sldMkLst>
+        <pc:spChg chg="mod">
+          <ac:chgData name="Xiaoling Yi" userId="23f28664-6c59-406e-87ca-bf1cc6d4f6c4" providerId="ADAL" clId="{A88309FF-F38B-4138-8EB8-37BF23FB4DA7}" dt="2026-03-03T20:45:47.801" v="41" actId="20577"/>
+          <ac:spMkLst>
+            <pc:docMk/>
+            <pc:sldMk cId="1241367408" sldId="304"/>
+            <ac:spMk id="22" creationId="{2FF847B5-95B7-A955-4E87-D016069F8027}"/>
           </ac:spMkLst>
         </pc:spChg>
       </pc:sldChg>
@@ -35622,14 +35737,14 @@
           <a:p>
             <a:pPr algn="ctr"/>
             <a:r>
-              <a:rPr lang="en-US" altLang="zh-CN" sz="1200" b="1">
+              <a:rPr lang="en-US" altLang="zh-CN" sz="1200" b="1" dirty="0">
                 <a:solidFill>
                   <a:srgbClr val="FF0000"/>
                 </a:solidFill>
                 <a:latin typeface="Cambria" panose="02040503050406030204" pitchFamily="18" charset="0"/>
                 <a:ea typeface="Cambria" panose="02040503050406030204" pitchFamily="18" charset="0"/>
               </a:rPr>
-              <a:t>[Apr-02/03]</a:t>
+              <a:t>[Apr-01/02]</a:t>
             </a:r>
           </a:p>
         </p:txBody>
@@ -39688,7 +39803,7 @@
         <p:spPr>
           <a:xfrm>
             <a:off x="5936620" y="288036"/>
-            <a:ext cx="2753538" cy="1149226"/>
+            <a:ext cx="2753538" cy="615862"/>
           </a:xfrm>
           <a:prstGeom prst="rect">
             <a:avLst/>
@@ -41426,16 +41541,16 @@
           <a:p>
             <a:pPr algn="ctr"/>
             <a:r>
-              <a:rPr lang="en-US" altLang="zh-CN" sz="1200" b="1">
+              <a:rPr lang="en-US" altLang="zh-CN" sz="1200" b="1" dirty="0">
                 <a:solidFill>
                   <a:srgbClr val="FF0000"/>
                 </a:solidFill>
                 <a:latin typeface="Cambria" panose="02040503050406030204" pitchFamily="18" charset="0"/>
                 <a:ea typeface="Cambria" panose="02040503050406030204" pitchFamily="18" charset="0"/>
               </a:rPr>
-              <a:t>[Mar-05/06]</a:t>
-            </a:r>
-            <a:endParaRPr lang="en-US" sz="1200" b="1">
+              <a:t>[Mar-04/05]</a:t>
+            </a:r>
+            <a:endParaRPr lang="en-US" sz="1200" b="1" dirty="0">
               <a:latin typeface="Cambria" panose="02040503050406030204" pitchFamily="18" charset="0"/>
               <a:ea typeface="Cambria" panose="02040503050406030204" pitchFamily="18" charset="0"/>
             </a:endParaRPr>
@@ -41472,16 +41587,16 @@
           <a:p>
             <a:pPr algn="ctr"/>
             <a:r>
-              <a:rPr lang="en-US" altLang="zh-CN" sz="1200" b="1">
+              <a:rPr lang="en-US" altLang="zh-CN" sz="1200" b="1" dirty="0">
                 <a:solidFill>
                   <a:srgbClr val="FF0000"/>
                 </a:solidFill>
                 <a:latin typeface="Cambria" panose="02040503050406030204" pitchFamily="18" charset="0"/>
                 <a:ea typeface="Cambria" panose="02040503050406030204" pitchFamily="18" charset="0"/>
               </a:rPr>
-              <a:t>[Apr-02/03]</a:t>
-            </a:r>
-            <a:endParaRPr lang="en-US" sz="1200" b="1">
+              <a:t>[Apr-01/02]</a:t>
+            </a:r>
+            <a:endParaRPr lang="en-US" sz="1200" b="1" dirty="0">
               <a:latin typeface="Cambria" panose="02040503050406030204" pitchFamily="18" charset="0"/>
               <a:ea typeface="Cambria" panose="02040503050406030204" pitchFamily="18" charset="0"/>
             </a:endParaRPr>
@@ -41684,16 +41799,16 @@
           <a:p>
             <a:pPr algn="ctr"/>
             <a:r>
-              <a:rPr lang="en-US" altLang="zh-CN" sz="1200" b="1">
+              <a:rPr lang="en-US" altLang="zh-CN" sz="1200" b="1" dirty="0">
                 <a:solidFill>
                   <a:srgbClr val="FF0000"/>
                 </a:solidFill>
                 <a:latin typeface="Cambria" panose="02040503050406030204" pitchFamily="18" charset="0"/>
                 <a:ea typeface="Cambria" panose="02040503050406030204" pitchFamily="18" charset="0"/>
               </a:rPr>
-              <a:t>[May-7/8]</a:t>
-            </a:r>
-            <a:endParaRPr lang="en-US" sz="1200" b="1">
+              <a:t>[May-11/12]</a:t>
+            </a:r>
+            <a:endParaRPr lang="en-US" sz="1200" b="1" dirty="0">
               <a:latin typeface="Cambria" panose="02040503050406030204" pitchFamily="18" charset="0"/>
               <a:ea typeface="Cambria" panose="02040503050406030204" pitchFamily="18" charset="0"/>
             </a:endParaRPr>
@@ -41783,7 +41898,7 @@
           <a:p>
             <a:pPr algn="ctr"/>
             <a:r>
-              <a:rPr lang="en-US" altLang="zh-CN" sz="1200" b="1">
+              <a:rPr lang="en-US" altLang="zh-CN" sz="1200" b="1" dirty="0">
                 <a:solidFill>
                   <a:schemeClr val="tx1"/>
                 </a:solidFill>
@@ -41793,16 +41908,16 @@
               <a:t>Submission Deadline </a:t>
             </a:r>
             <a:r>
-              <a:rPr lang="en-US" altLang="zh-CN" sz="1200" b="1">
+              <a:rPr lang="en-US" altLang="zh-CN" sz="1200" b="1" dirty="0">
                 <a:solidFill>
                   <a:srgbClr val="FF0000"/>
                 </a:solidFill>
                 <a:latin typeface="Cambria" panose="02040503050406030204" pitchFamily="18" charset="0"/>
                 <a:ea typeface="Cambria" panose="02040503050406030204" pitchFamily="18" charset="0"/>
               </a:rPr>
-              <a:t>[May-2]</a:t>
-            </a:r>
-            <a:endParaRPr lang="en-US" sz="1200" b="1">
+              <a:t>[May-1]</a:t>
+            </a:r>
+            <a:endParaRPr lang="en-US" sz="1200" b="1" dirty="0">
               <a:solidFill>
                 <a:srgbClr val="FF0000"/>
               </a:solidFill>
@@ -41995,59 +42110,6 @@
           </a:p>
         </p:txBody>
       </p:sp>
-      <p:sp>
-        <p:nvSpPr>
-          <p:cNvPr id="14" name="TextBox 13">
-            <a:extLst>
-              <a:ext uri="{FF2B5EF4-FFF2-40B4-BE49-F238E27FC236}">
-                <a16:creationId xmlns:a16="http://schemas.microsoft.com/office/drawing/2014/main" id="{8335B34A-C3EE-7BCF-7848-684DA17CA4DC}"/>
-              </a:ext>
-            </a:extLst>
-          </p:cNvPr>
-          <p:cNvSpPr txBox="1"/>
-          <p:nvPr/>
-        </p:nvSpPr>
-        <p:spPr>
-          <a:xfrm>
-            <a:off x="6981118" y="63549"/>
-            <a:ext cx="1713854" cy="276999"/>
-          </a:xfrm>
-          <a:prstGeom prst="rect">
-            <a:avLst/>
-          </a:prstGeom>
-          <a:noFill/>
-        </p:spPr>
-        <p:txBody>
-          <a:bodyPr wrap="square">
-            <a:spAutoFit/>
-          </a:bodyPr>
-          <a:lstStyle/>
-          <a:p>
-            <a:pPr algn="r"/>
-            <a:r>
-              <a:rPr lang="en-US" altLang="zh-CN" sz="1200" b="1" i="1">
-                <a:solidFill>
-                  <a:schemeClr val="accent6">
-                    <a:lumMod val="75000"/>
-                  </a:schemeClr>
-                </a:solidFill>
-                <a:latin typeface="Cambria" panose="02040503050406030204" pitchFamily="18" charset="0"/>
-                <a:ea typeface="Cambria" panose="02040503050406030204" pitchFamily="18" charset="0"/>
-              </a:rPr>
-              <a:t>Final Schedule</a:t>
-            </a:r>
-            <a:endParaRPr lang="en-US" sz="1200" b="1" i="1">
-              <a:solidFill>
-                <a:schemeClr val="accent6">
-                  <a:lumMod val="75000"/>
-                </a:schemeClr>
-              </a:solidFill>
-              <a:latin typeface="Cambria" panose="02040503050406030204" pitchFamily="18" charset="0"/>
-              <a:ea typeface="Cambria" panose="02040503050406030204" pitchFamily="18" charset="0"/>
-            </a:endParaRPr>
-          </a:p>
-        </p:txBody>
-      </p:sp>
     </p:spTree>
     <p:extLst>
       <p:ext uri="{BB962C8B-B14F-4D97-AF65-F5344CB8AC3E}">
@@ -42070,6 +42132,9 @@
                     <p:cTn id="3" fill="hold">
                       <p:stCondLst>
                         <p:cond delay="indefinite"/>
+                        <p:cond evt="onBegin" delay="0">
+                          <p:tn val="2"/>
+                        </p:cond>
                       </p:stCondLst>
                       <p:childTnLst>
                         <p:par>
@@ -42079,7 +42144,7 @@
                             </p:stCondLst>
                             <p:childTnLst>
                               <p:par>
-                                <p:cTn id="5" presetID="1" presetClass="entr" presetSubtype="0" fill="hold" grpId="0" nodeType="clickEffect">
+                                <p:cTn id="5" presetID="1" presetClass="entr" presetSubtype="0" fill="hold" grpId="0" nodeType="withEffect">
                                   <p:stCondLst>
                                     <p:cond delay="0"/>
                                   </p:stCondLst>
@@ -42087,33 +42152,6 @@
                                     <p:set>
                                       <p:cBhvr>
                                         <p:cTn id="6" dur="1" fill="hold">
-                                          <p:stCondLst>
-                                            <p:cond delay="0"/>
-                                          </p:stCondLst>
-                                        </p:cTn>
-                                        <p:tgtEl>
-                                          <p:spTgt spid="14"/>
-                                        </p:tgtEl>
-                                        <p:attrNameLst>
-                                          <p:attrName>style.visibility</p:attrName>
-                                        </p:attrNameLst>
-                                      </p:cBhvr>
-                                      <p:to>
-                                        <p:strVal val="visible"/>
-                                      </p:to>
-                                    </p:set>
-                                  </p:childTnLst>
-                                </p:cTn>
-                              </p:par>
-                              <p:par>
-                                <p:cTn id="7" presetID="1" presetClass="entr" presetSubtype="0" fill="hold" grpId="0" nodeType="withEffect">
-                                  <p:stCondLst>
-                                    <p:cond delay="0"/>
-                                  </p:stCondLst>
-                                  <p:childTnLst>
-                                    <p:set>
-                                      <p:cBhvr>
-                                        <p:cTn id="8" dur="1" fill="hold">
                                           <p:stCondLst>
                                             <p:cond delay="0"/>
                                           </p:stCondLst>
@@ -42161,7 +42199,6 @@
     </p:tnLst>
     <p:bldLst>
       <p:bldP spid="12" grpId="0" animBg="1"/>
-      <p:bldP spid="14" grpId="0"/>
     </p:bldLst>
   </p:timing>
 </p:sld>
@@ -48682,14 +48719,14 @@
           <a:p>
             <a:pPr algn="ctr"/>
             <a:r>
-              <a:rPr lang="en-US" altLang="zh-CN" sz="1200" b="1">
+              <a:rPr lang="en-US" altLang="zh-CN" sz="1200" b="1" dirty="0">
                 <a:solidFill>
                   <a:srgbClr val="FF0000"/>
                 </a:solidFill>
                 <a:latin typeface="Cambria" panose="02040503050406030204" pitchFamily="18" charset="0"/>
                 <a:ea typeface="Cambria" panose="02040503050406030204" pitchFamily="18" charset="0"/>
               </a:rPr>
-              <a:t>[Mar-05/06]</a:t>
+              <a:t>[Mar-04/05]</a:t>
             </a:r>
           </a:p>
         </p:txBody>
@@ -51374,14 +51411,14 @@
           <a:p>
             <a:pPr algn="ctr"/>
             <a:r>
-              <a:rPr lang="en-US" altLang="zh-CN" sz="1200" b="1">
+              <a:rPr lang="en-US" altLang="zh-CN" sz="1200" b="1" dirty="0">
                 <a:solidFill>
                   <a:srgbClr val="FF0000"/>
                 </a:solidFill>
                 <a:latin typeface="Cambria" panose="02040503050406030204" pitchFamily="18" charset="0"/>
                 <a:ea typeface="Cambria" panose="02040503050406030204" pitchFamily="18" charset="0"/>
               </a:rPr>
-              <a:t>[Apr-02/03]</a:t>
+              <a:t>[Apr-01/02]</a:t>
             </a:r>
           </a:p>
         </p:txBody>
@@ -55253,16 +55290,16 @@
           <a:p>
             <a:pPr algn="ctr"/>
             <a:r>
-              <a:rPr lang="en-US" altLang="zh-CN" sz="1200" b="1">
+              <a:rPr lang="en-US" altLang="zh-CN" sz="1200" b="1" dirty="0">
                 <a:solidFill>
                   <a:srgbClr val="FF0000"/>
                 </a:solidFill>
                 <a:latin typeface="Cambria" panose="02040503050406030204" pitchFamily="18" charset="0"/>
                 <a:ea typeface="Cambria" panose="02040503050406030204" pitchFamily="18" charset="0"/>
               </a:rPr>
-              <a:t>[Apr-02/03]</a:t>
-            </a:r>
-            <a:endParaRPr lang="en-US" sz="1200" b="1">
+              <a:t>[Apr-01/02]</a:t>
+            </a:r>
+            <a:endParaRPr lang="en-US" sz="1200" b="1" dirty="0">
               <a:latin typeface="Cambria" panose="02040503050406030204" pitchFamily="18" charset="0"/>
               <a:ea typeface="Cambria" panose="02040503050406030204" pitchFamily="18" charset="0"/>
             </a:endParaRPr>
